--- a/decks/hist-mughal-india/hist-mughal-india_ch2_six-emperors.pptx
+++ b/decks/hist-mughal-india/hist-mughal-india_ch2_six-emperors.pptx
@@ -123,29 +123,29 @@
   <p:extLst>
     <p:ext uri="{521415D9-36F7-43E2-AB2F-B90AF26B5E84}">
       <p14:sectionLst xmlns:p14="http://schemas.microsoft.com/office/powerpoint/2010/main">
-        <p14:section name="Opening" id="{b9051362-f559-d172-a0b9-6c0a11e804b8}">
+        <p14:section name="Opening" id="{9e282d59-c3ab-16a8-f4c3-325efab07f92}">
           <p14:sldIdLst>
             <p14:sldId id="256"/>
           </p14:sldIdLst>
         </p14:section>
-        <p14:section name="Gate" id="{2c722016-940d-4f56-f728-0568b56d12f1}">
+        <p14:section name="Gate" id="{c3b46bd7-614e-db32-f94d-6326d81e3332}">
           <p14:sldIdLst>
             <p14:sldId id="257"/>
             <p14:sldId id="258"/>
           </p14:sldIdLst>
         </p14:section>
-        <p14:section name="Pre-teach" id="{ea38a2c7-66d8-4411-9f90-567c65be3384}">
+        <p14:section name="Pre-teach" id="{24277e2a-8b70-39f8-9693-c358b62ab6b3}">
           <p14:sldIdLst>
             <p14:sldId id="259"/>
           </p14:sldIdLst>
         </p14:section>
-        <p14:section name="Read-along" id="{fe04d135-17bd-9694-84d1-a5f81a2447f7}">
+        <p14:section name="Read-along" id="{b461afd2-639d-fbb2-961f-79881f1f68c5}">
           <p14:sldIdLst>
             <p14:sldId id="260"/>
             <p14:sldId id="261"/>
           </p14:sldIdLst>
         </p14:section>
-        <p14:section name="Teach" id="{29740553-8a53-973b-5f14-92a4d99b0fe6}">
+        <p14:section name="Teach" id="{bcc9970e-4a6f-ca1a-6cbb-f488e7e8c990}">
           <p14:sldIdLst>
             <p14:sldId id="262"/>
             <p14:sldId id="263"/>
@@ -153,19 +153,19 @@
             <p14:sldId id="265"/>
           </p14:sldIdLst>
         </p14:section>
-        <p14:section name="Routes" id="{68854b0f-148f-4262-9753-358b4bb5fb6c}">
+        <p14:section name="Routes" id="{924199b5-92fd-ab25-c916-851e7472da9a}">
           <p14:sldIdLst>
             <p14:sldId id="266"/>
             <p14:sldId id="267"/>
             <p14:sldId id="268"/>
           </p14:sldIdLst>
         </p14:section>
-        <p14:section name="Close" id="{fcbb1194-c94b-54a0-eb0d-4704c03c92b2}">
+        <p14:section name="Close" id="{1c7161ad-3083-34d4-385c-305d0c33b88f}">
           <p14:sldIdLst>
             <p14:sldId id="269"/>
           </p14:sldIdLst>
         </p14:section>
-        <p14:section name="Answers" id="{c29b26f3-58ae-0649-d00c-6bc363f7fa78}">
+        <p14:section name="Answers" id="{47eee8b7-9c4e-e6e1-8434-20c4380531af}">
           <p14:sldIdLst>
             <p14:sldId id="270"/>
             <p14:sldId id="271"/>
@@ -1882,7 +1882,7 @@
               <a:rPr lang="en-US" dirty="0"/>
               <a:t>Teach — Humayun: a throne lost and won back. Say it in your own words, then check understanding with a quick question: ask a pupil from the pre-teach group first, since they met these words and ideas before the lesson. Pupils try to recall before you re-explain.
 Humayun, Babur's son, became emperor in 1530 at 22 years old. He was inexperienced as a politician and a soldier, and he preferred writing poetry to the battlefield. He faced constant challenges to his rule and could not stamp his control on the Empire.
-In 1540 he was forced into exile: he had to leave the Empire and look for allies who would help him return. It took him fifteen years. In 1555 he marched his forces back into northern India and retook the throne.
+In 1540 he was forced into exile: he had to flee the Empire and search for allies who would help him return. It took him fifteen years. In 1555 he marched his forces back into northern India and retook the throne.
 Back in power, Humayun began to set up the administration that had been missing under his father, including a system for collecting tax. Then, in 1556, he died suddenly after falling down a flight of stone stairs. His legacy was to set the stage for his son Akbar.
 Worked example — model it step by step, thinking aloud: How long was Humayun in exile? (1) Find the two dates: forced into exile in 1540, retook the throne in 1555. (2) Later date minus earlier date: 1555 − 1540. (3) 55 − 40 = 15. (4) Check: your lesson says it took him fifteen years to take back control. Answer: 15 years.</a:t>
             </a:r>
@@ -14427,7 +14427,7 @@
                 <a:ea typeface="Calibri" pitchFamily="34" charset="-122"/>
                 <a:cs typeface="Calibri" pitchFamily="34" charset="-120"/>
               </a:rPr>
-              <a:t>In 1540 he was forced into exile: he had to leave the Empire and look for allies who would help him return.</a:t>
+              <a:t>In 1540 he was forced into exile: he had to flee the Empire and search for allies who would help him return.</a:t>
             </a:r>
             <a:endParaRPr lang="en-US" sz="2200" dirty="0"/>
           </a:p>
